--- a/docs/presentation/Carbon-Urban-DSS-팀원-작업지시서.pptx
+++ b/docs/presentation/Carbon-Urban-DSS-팀원-작업지시서.pptx
@@ -3776,7 +3776,7 @@
                 <a:ea typeface="Malgun Gothic" pitchFamily="34" charset="-122"/>
                 <a:cs typeface="Malgun Gothic" pitchFamily="34" charset="-120"/>
               </a:rPr>
-              <a:t>2026-10-08 준비 완료, 2025년만 관측. 과거 연도를 채워 2019 재건축 입주 전후를 본다</a:t>
+              <a:t>기준 PC: 2025 + 건축HUB 2020~2024(10/08). K-apt 과거를 채워 2019 재건축 입주 전후를 본다</a:t>
             </a:r>
             <a:endParaRPr lang="en-US" sz="1300" dirty="0"/>
           </a:p>
@@ -4474,7 +4474,7 @@
                 <a:ea typeface="Malgun Gothic" pitchFamily="34" charset="-122"/>
                 <a:cs typeface="Malgun Gothic" pitchFamily="34" charset="-120"/>
               </a:rPr>
-              <a:t>… python -m app.cli region-energy-history --region 11740 --years 2024,2023,2022,2021,2020</a:t>
+              <a:t>… python -m app.cli region-energy-history --region 11740 --years 2024,2023,2022,2021,2020 → 기준 PC 값과 비교 (같은 지번 2021→2025: 고덕2동 93곳 +1.5%, 천호3동 407곳 +7.2%)</a:t>
             </a:r>
             <a:endParaRPr lang="en-US" sz="1050" dirty="0"/>
           </a:p>
@@ -4807,7 +4807,7 @@
                 <a:ea typeface="Malgun Gothic" pitchFamily="34" charset="-122"/>
                 <a:cs typeface="Malgun Gothic" pitchFamily="34" charset="-120"/>
               </a:rPr>
-              <a:t>2026-10-08 준비 완료. 격자 대부분의 주된 용도지역이 "기타"로 나와 상업지를 격자로 골랐다 → 원인 찾기도 과제</a:t>
+              <a:t>기준 PC: 2025 + 건축HUB 2021~2024. 격자 대부분의 주된 용도지역이 "기타"로 나와 상업지를 격자로 골랐다 → 원인 찾기도 과제</a:t>
             </a:r>
             <a:endParaRPr lang="en-US" sz="1300" dirty="0"/>
           </a:p>
@@ -5505,7 +5505,7 @@
                 <a:ea typeface="Malgun Gothic" pitchFamily="34" charset="-122"/>
                 <a:cs typeface="Malgun Gothic" pitchFamily="34" charset="-120"/>
               </a:rPr>
-              <a:t>region-energy-history --region 26440 --years 2024,2023,2022,2021,2020</a:t>
+              <a:t>region-energy-history --region 26440 --years 2024,2023,2022,2021,2020 → 기준 PC 값과 비교 (같은 지번 2021→2025: 명지1동 367곳 +60.9%, 상업 격자 7곳 +679.9%)</a:t>
             </a:r>
             <a:endParaRPr lang="en-US" sz="1050" dirty="0"/>
           </a:p>
@@ -22180,7 +22180,7 @@
                 <a:ea typeface="Malgun Gothic" pitchFamily="34" charset="-122"/>
                 <a:cs typeface="Malgun Gothic" pitchFamily="34" charset="-120"/>
               </a:rPr>
-              <a:t>git pull · Doctor</a:t>
+              <a:t>API 키 각자 발급 · git pull · Doctor</a:t>
             </a:r>
             <a:endParaRPr lang="en-US" sz="1200" dirty="0"/>
           </a:p>
@@ -25031,7 +25031,7 @@
                           <a:ea typeface="Malgun Gothic" pitchFamily="34" charset="-122"/>
                           <a:cs typeface="Malgun Gothic" pitchFamily="34" charset="-120"/>
                         </a:rPr>
-                        <a:t>2025</a:t>
+                        <a:t>2025, 건축HUB 2020~</a:t>
                       </a:r>
                       <a:endParaRPr lang="en-US" sz="1200" dirty="0">
                         <a:latin typeface="Malgun Gothic" charset="0"/>
@@ -25099,7 +25099,7 @@
                           <a:ea typeface="Malgun Gothic" pitchFamily="34" charset="-122"/>
                           <a:cs typeface="Malgun Gothic" pitchFamily="34" charset="-120"/>
                         </a:rPr>
-                        <a:t>건축HUB 2020~2024, K-apt 과거(개발 필요)</a:t>
+                        <a:t>건축HUB 2020~2024(값 비교), K-apt 과거(개발 필요)</a:t>
                       </a:r>
                       <a:endParaRPr lang="en-US" sz="1200" dirty="0">
                         <a:latin typeface="Malgun Gothic" charset="0"/>
@@ -25498,7 +25498,7 @@
                           <a:ea typeface="Malgun Gothic" pitchFamily="34" charset="-122"/>
                           <a:cs typeface="Malgun Gothic" pitchFamily="34" charset="-120"/>
                         </a:rPr>
-                        <a:t>2025</a:t>
+                        <a:t>2025, 건축HUB 2021~</a:t>
                       </a:r>
                       <a:endParaRPr lang="en-US" sz="1200" dirty="0">
                         <a:latin typeface="Malgun Gothic" charset="0"/>
@@ -25566,7 +25566,7 @@
                           <a:ea typeface="Malgun Gothic" pitchFamily="34" charset="-122"/>
                           <a:cs typeface="Malgun Gothic" pitchFamily="34" charset="-120"/>
                         </a:rPr>
-                        <a:t>건축HUB 2020~2024, 용도지역 점검</a:t>
+                        <a:t>건축HUB 2020~2024(값 비교), 용도지역 점검</a:t>
                       </a:r>
                       <a:endParaRPr lang="en-US" sz="1200" dirty="0">
                         <a:latin typeface="Malgun Gothic" charset="0"/>
@@ -26183,7 +26183,7 @@
                 <a:ea typeface="Malgun Gothic" pitchFamily="34" charset="-122"/>
                 <a:cs typeface="Malgun Gothic" pitchFamily="34" charset="-120"/>
               </a:rPr>
-              <a:t>기준 PC 값이 있는 해(2025)는 같은 API·도구면 ±0.5% 안에서 같아야 함 → 수집이 제대로 됐는지의 시험</a:t>
+              <a:t>기준 PC 값이 있는 해(2025, 강동·강서는 건축HUB 과거 연도도)는 같은 API·도구면 ±0.5% 안에서 같아야 함 → 수집이 제대로 됐는지의 시험</a:t>
             </a:r>
             <a:endParaRPr lang="en-US" sz="1250" dirty="0"/>
           </a:p>

--- a/docs/presentation/Carbon-Urban-DSS-팀원-작업지시서.pptx
+++ b/docs/presentation/Carbon-Urban-DSS-팀원-작업지시서.pptx
@@ -5799,7 +5799,7 @@
                 <a:ea typeface="Malgun Gothic" pitchFamily="34" charset="-122"/>
                 <a:cs typeface="Malgun Gothic" pitchFamily="34" charset="-120"/>
               </a:rPr>
-              <a:t>T4 · 세종시 36110 — 계획도시, 기준 PC가 아직 준비 중</a:t>
+              <a:t>T4 · 세종시 36110 — 계획도시 신규 입주 지역</a:t>
             </a:r>
             <a:endParaRPr lang="en-US" sz="2600" dirty="0"/>
           </a:p>
@@ -5838,7 +5838,7 @@
                 <a:ea typeface="Malgun Gothic" pitchFamily="34" charset="-122"/>
                 <a:cs typeface="Malgun Gothic" pitchFamily="34" charset="-120"/>
               </a:rPr>
-              <a:t>단지·용도지역은 받음, 건물·지적·대장·에너지는 진행 중 → 기준 PC 값이 없어 예상표가 곧 시험</a:t>
+              <a:t>기준 PC: 10/09 준비 완료, 2025 + 건축HUB 2020~2024. 예상표를 먼저 쓰고 수집 후 값·기준 PC 값과 비교</a:t>
             </a:r>
             <a:endParaRPr lang="en-US" sz="1300" dirty="0"/>
           </a:p>
@@ -6021,7 +6021,7 @@
                 <a:ea typeface="Malgun Gothic" pitchFamily="34" charset="-122"/>
                 <a:cs typeface="Malgun Gothic" pitchFamily="34" charset="-120"/>
               </a:rPr>
-              <a:t>기준 PC 값 없음 → 4절 공식으로 예상 (공동주택 원단위 24~30, 지역 효율 21~25%)</a:t>
+              <a:t>기준 PC 2025: K-apt 23,550,082 kWh · 원단위 22.94(참고 범위 24~30 아래) · 필요 감축 2,635.3 t · 지역 효율 24.4% · 태양광 5,073.5 kW</a:t>
             </a:r>
             <a:endParaRPr lang="en-US" sz="1050" dirty="0"/>
           </a:p>
@@ -6243,7 +6243,7 @@
                 <a:ea typeface="Malgun Gothic" pitchFamily="34" charset="-122"/>
                 <a:cs typeface="Malgun Gothic" pitchFamily="34" charset="-120"/>
               </a:rPr>
-              <a:t>기준 PC 값 없음 → 건물 전체 원단위 41~78 범위로 예상</a:t>
+              <a:t>기준 PC 2025: 건축HUB 148,622,441 kWh · 원단위 47.48 · 필요 감축 13,693.1 t · 지역 효율 21.0% · 태양광 26,361.9 kW</a:t>
             </a:r>
             <a:endParaRPr lang="en-US" sz="1050" dirty="0"/>
           </a:p>
@@ -6412,7 +6412,7 @@
                 <a:ea typeface="Malgun Gothic" pitchFamily="34" charset="-122"/>
                 <a:cs typeface="Malgun Gothic" pitchFamily="34" charset="-120"/>
               </a:rPr>
-              <a:t>T4-b 예상표 범위 안이면 "적중", 밖이면 원인</a:t>
+              <a:t>T4-b 예상표 범위 안이면 "적중", 밖이면 원인 (해밀동 원단위 22.94는 범위 아래)</a:t>
             </a:r>
             <a:endParaRPr lang="en-US" sz="1100" dirty="0"/>
           </a:p>
@@ -6557,7 +6557,7 @@
                 <a:ea typeface="Malgun Gothic" pitchFamily="34" charset="-122"/>
                 <a:cs typeface="Malgun Gothic" pitchFamily="34" charset="-120"/>
               </a:rPr>
-              <a:t>이후 region-energy-history --region 36110, K-apt 과거 연도(T2-dev1 이후)</a:t>
+              <a:t>region-energy-history --region 36110 → 기준 PC 값과 비교 (같은 지번 2021→2025: 해밀동 4곳 +4.6%, 어진동 29곳 +69.3%)</a:t>
             </a:r>
             <a:endParaRPr lang="en-US" sz="1050" dirty="0"/>
           </a:p>
@@ -6578,7 +6578,7 @@
                 <a:ea typeface="Malgun Gothic" pitchFamily="34" charset="-122"/>
                 <a:cs typeface="Malgun Gothic" pitchFamily="34" charset="-120"/>
               </a:rPr>
-              <a:t>일사량 ERA5 이미 있음</a:t>
+              <a:t>K-apt 과거 연도(T2-dev1 이후), 일사량 ERA5 1,500 kWh/m²</a:t>
             </a:r>
             <a:endParaRPr lang="en-US" sz="1050" dirty="0"/>
           </a:p>
@@ -25965,7 +25965,7 @@
                           <a:ea typeface="Malgun Gothic" pitchFamily="34" charset="-122"/>
                           <a:cs typeface="Malgun Gothic" pitchFamily="34" charset="-120"/>
                         </a:rPr>
-                        <a:t>준비 중 (값 없음)</a:t>
+                        <a:t>2025, 건축HUB 2020~</a:t>
                       </a:r>
                       <a:endParaRPr lang="en-US" sz="1200" dirty="0">
                         <a:latin typeface="Malgun Gothic" charset="0"/>
@@ -26033,7 +26033,7 @@
                           <a:ea typeface="Malgun Gothic" pitchFamily="34" charset="-122"/>
                           <a:cs typeface="Malgun Gothic" pitchFamily="34" charset="-120"/>
                         </a:rPr>
-                        <a:t>지역 준비 전체, 사례 추가</a:t>
+                        <a:t>지역 준비 전체(값 비교), 사례 추가</a:t>
                       </a:r>
                       <a:endParaRPr lang="en-US" sz="1200" dirty="0">
                         <a:latin typeface="Malgun Gothic" charset="0"/>
@@ -26183,7 +26183,7 @@
                 <a:ea typeface="Malgun Gothic" pitchFamily="34" charset="-122"/>
                 <a:cs typeface="Malgun Gothic" pitchFamily="34" charset="-120"/>
               </a:rPr>
-              <a:t>기준 PC 값이 있는 해(2025, 강동·강서는 건축HUB 과거 연도도)는 같은 API·도구면 ±0.5% 안에서 같아야 함 → 수집이 제대로 됐는지의 시험</a:t>
+              <a:t>기준 PC 값이 있는 해(2025, 강동·강서·세종은 건축HUB 2020~2024도)는 같은 API·도구면 ±0.5% 안에서 같아야 함 → 수집이 제대로 됐는지의 시험</a:t>
             </a:r>
             <a:endParaRPr lang="en-US" sz="1250" dirty="0"/>
           </a:p>
